--- a/powerpoint/BeerFlow_Pro_Presentation.pptx
+++ b/powerpoint/BeerFlow_Pro_Presentation.pptx
@@ -10435,7 +10435,7 @@
                 </a:solidFill>
                 <a:latin typeface="Calibri"/>
               </a:rPr>
-              <a:t>6</a:t>
+              <a:t>0</a:t>
             </a:r>
           </a:p>
         </p:txBody>
@@ -10663,7 +10663,7 @@
                 </a:solidFill>
                 <a:latin typeface="Calibri"/>
               </a:rPr>
-              <a:t>13</a:t>
+              <a:t>20</a:t>
             </a:r>
           </a:p>
         </p:txBody>
@@ -10891,7 +10891,7 @@
                 </a:solidFill>
                 <a:latin typeface="Calibri"/>
               </a:rPr>
-              <a:t>1</a:t>
+              <a:t>0</a:t>
             </a:r>
           </a:p>
         </p:txBody>
@@ -11815,7 +11815,7 @@
                 </a:solidFill>
                 <a:latin typeface="Calibri"/>
               </a:rPr>
-              <a:t>DIST-EAS-01</a:t>
+              <a:t>DIST-NOR-04</a:t>
             </a:r>
           </a:p>
         </p:txBody>
@@ -11893,7 +11893,7 @@
                 </a:solidFill>
                 <a:latin typeface="Calibri"/>
               </a:rPr>
-              <a:t>North India</a:t>
+              <a:t>East India</a:t>
             </a:r>
           </a:p>
         </p:txBody>
@@ -11971,7 +11971,7 @@
                 </a:solidFill>
                 <a:latin typeface="Calibri"/>
               </a:rPr>
-              <a:t>89.0%</a:t>
+              <a:t>94.1%</a:t>
             </a:r>
           </a:p>
         </p:txBody>
@@ -12049,7 +12049,7 @@
                 </a:solidFill>
                 <a:latin typeface="Calibri"/>
               </a:rPr>
-              <a:t>0.24%</a:t>
+              <a:t>2.54%</a:t>
             </a:r>
           </a:p>
         </p:txBody>
@@ -12127,7 +12127,7 @@
                 </a:solidFill>
                 <a:latin typeface="Calibri"/>
               </a:rPr>
-              <a:t>90.1</a:t>
+              <a:t>84.9</a:t>
             </a:r>
           </a:p>
         </p:txBody>
@@ -12205,7 +12205,7 @@
                 </a:solidFill>
                 <a:latin typeface="Calibri"/>
               </a:rPr>
-              <a:t>A</a:t>
+              <a:t>B</a:t>
             </a:r>
           </a:p>
         </p:txBody>
@@ -12283,7 +12283,7 @@
                 </a:solidFill>
                 <a:latin typeface="Calibri"/>
               </a:rPr>
-              <a:t>DIST-EAS-03</a:t>
+              <a:t>DIST-WES-01</a:t>
             </a:r>
           </a:p>
         </p:txBody>
@@ -12361,7 +12361,7 @@
                 </a:solidFill>
                 <a:latin typeface="Calibri"/>
               </a:rPr>
-              <a:t>West India</a:t>
+              <a:t>Central India</a:t>
             </a:r>
           </a:p>
         </p:txBody>
@@ -12439,7 +12439,7 @@
                 </a:solidFill>
                 <a:latin typeface="Calibri"/>
               </a:rPr>
-              <a:t>95.0%</a:t>
+              <a:t>78.1%</a:t>
             </a:r>
           </a:p>
         </p:txBody>
@@ -12517,7 +12517,7 @@
                 </a:solidFill>
                 <a:latin typeface="Calibri"/>
               </a:rPr>
-              <a:t>1.00%</a:t>
+              <a:t>0.77%</a:t>
             </a:r>
           </a:p>
         </p:txBody>
@@ -12595,7 +12595,7 @@
                 </a:solidFill>
                 <a:latin typeface="Calibri"/>
               </a:rPr>
-              <a:t>89.9</a:t>
+              <a:t>84.1</a:t>
             </a:r>
           </a:p>
         </p:txBody>
@@ -12673,7 +12673,7 @@
                 </a:solidFill>
                 <a:latin typeface="Calibri"/>
               </a:rPr>
-              <a:t>A</a:t>
+              <a:t>B</a:t>
             </a:r>
           </a:p>
         </p:txBody>
@@ -12751,7 +12751,7 @@
                 </a:solidFill>
                 <a:latin typeface="Calibri"/>
               </a:rPr>
-              <a:t>DIST-CEN-03</a:t>
+              <a:t>DIST-CEN-02</a:t>
             </a:r>
           </a:p>
         </p:txBody>
@@ -12829,7 +12829,7 @@
                 </a:solidFill>
                 <a:latin typeface="Calibri"/>
               </a:rPr>
-              <a:t>West India</a:t>
+              <a:t>North India</a:t>
             </a:r>
           </a:p>
         </p:txBody>
@@ -12907,7 +12907,7 @@
                 </a:solidFill>
                 <a:latin typeface="Calibri"/>
               </a:rPr>
-              <a:t>93.0%</a:t>
+              <a:t>91.9%</a:t>
             </a:r>
           </a:p>
         </p:txBody>
@@ -12985,7 +12985,7 @@
                 </a:solidFill>
                 <a:latin typeface="Calibri"/>
               </a:rPr>
-              <a:t>3.19%</a:t>
+              <a:t>0.92%</a:t>
             </a:r>
           </a:p>
         </p:txBody>
@@ -13063,7 +13063,7 @@
                 </a:solidFill>
                 <a:latin typeface="Calibri"/>
               </a:rPr>
-              <a:t>87.3</a:t>
+              <a:t>84.1</a:t>
             </a:r>
           </a:p>
         </p:txBody>
@@ -13141,7 +13141,7 @@
                 </a:solidFill>
                 <a:latin typeface="Calibri"/>
               </a:rPr>
-              <a:t>A</a:t>
+              <a:t>B</a:t>
             </a:r>
           </a:p>
         </p:txBody>
@@ -13767,7 +13767,7 @@
                 </a:solidFill>
                 <a:latin typeface="Calibri"/>
               </a:rPr>
-              <a:t>DIST-NOR-03</a:t>
+              <a:t>DIST-WES-03</a:t>
             </a:r>
           </a:p>
         </p:txBody>
@@ -13845,7 +13845,7 @@
                 </a:solidFill>
                 <a:latin typeface="Calibri"/>
               </a:rPr>
-              <a:t>West India</a:t>
+              <a:t>Central India</a:t>
             </a:r>
           </a:p>
         </p:txBody>
@@ -13923,7 +13923,7 @@
                 </a:solidFill>
                 <a:latin typeface="Calibri"/>
               </a:rPr>
-              <a:t>62.9%</a:t>
+              <a:t>66.4%</a:t>
             </a:r>
           </a:p>
         </p:txBody>
@@ -14001,7 +14001,7 @@
                 </a:solidFill>
                 <a:latin typeface="Calibri"/>
               </a:rPr>
-              <a:t>2.84%</a:t>
+              <a:t>2.03%</a:t>
             </a:r>
           </a:p>
         </p:txBody>
@@ -14079,7 +14079,7 @@
                 </a:solidFill>
                 <a:latin typeface="Calibri"/>
               </a:rPr>
-              <a:t>68.6</a:t>
+              <a:t>74.2</a:t>
             </a:r>
           </a:p>
         </p:txBody>
@@ -14157,7 +14157,7 @@
                 </a:solidFill>
                 <a:latin typeface="Calibri"/>
               </a:rPr>
-              <a:t>C</a:t>
+              <a:t>B</a:t>
             </a:r>
           </a:p>
         </p:txBody>
@@ -14235,7 +14235,7 @@
                 </a:solidFill>
                 <a:latin typeface="Calibri"/>
               </a:rPr>
-              <a:t>DIST-SOU-03</a:t>
+              <a:t>DIST-EAS-03</a:t>
             </a:r>
           </a:p>
         </p:txBody>
@@ -14313,7 +14313,7 @@
                 </a:solidFill>
                 <a:latin typeface="Calibri"/>
               </a:rPr>
-              <a:t>Central India</a:t>
+              <a:t>North India</a:t>
             </a:r>
           </a:p>
         </p:txBody>
@@ -14391,7 +14391,7 @@
                 </a:solidFill>
                 <a:latin typeface="Calibri"/>
               </a:rPr>
-              <a:t>62.7%</a:t>
+              <a:t>81.5%</a:t>
             </a:r>
           </a:p>
         </p:txBody>
@@ -14469,7 +14469,7 @@
                 </a:solidFill>
                 <a:latin typeface="Calibri"/>
               </a:rPr>
-              <a:t>3.14%</a:t>
+              <a:t>2.63%</a:t>
             </a:r>
           </a:p>
         </p:txBody>
@@ -14547,7 +14547,7 @@
                 </a:solidFill>
                 <a:latin typeface="Calibri"/>
               </a:rPr>
-              <a:t>72.4</a:t>
+              <a:t>75.7</a:t>
             </a:r>
           </a:p>
         </p:txBody>
@@ -14703,7 +14703,7 @@
                 </a:solidFill>
                 <a:latin typeface="Calibri"/>
               </a:rPr>
-              <a:t>DIST-EAS-04</a:t>
+              <a:t>DIST-WES-04</a:t>
             </a:r>
           </a:p>
         </p:txBody>
@@ -14859,7 +14859,7 @@
                 </a:solidFill>
                 <a:latin typeface="Calibri"/>
               </a:rPr>
-              <a:t>70.2%</a:t>
+              <a:t>76.6%</a:t>
             </a:r>
           </a:p>
         </p:txBody>
@@ -14937,7 +14937,7 @@
                 </a:solidFill>
                 <a:latin typeface="Calibri"/>
               </a:rPr>
-              <a:t>3.00%</a:t>
+              <a:t>3.35%</a:t>
             </a:r>
           </a:p>
         </p:txBody>
@@ -15015,7 +15015,7 @@
                 </a:solidFill>
                 <a:latin typeface="Calibri"/>
               </a:rPr>
-              <a:t>72.4</a:t>
+              <a:t>76.2</a:t>
             </a:r>
           </a:p>
         </p:txBody>
@@ -33339,7 +33339,7 @@
         <p:spPr>
           <a:xfrm>
             <a:off x="3017520" y="2414016"/>
-            <a:ext cx="296997" cy="219456"/>
+            <a:ext cx="348203" cy="219456"/>
           </a:xfrm>
           <a:prstGeom prst="rect">
             <a:avLst/>
@@ -33381,7 +33381,7 @@
         </p:nvSpPr>
         <p:spPr>
           <a:xfrm>
-            <a:off x="3360237" y="2395728"/>
+            <a:off x="3411443" y="2395728"/>
             <a:ext cx="548640" cy="237744"/>
           </a:xfrm>
           <a:prstGeom prst="rect">
@@ -33403,7 +33403,7 @@
                 </a:solidFill>
                 <a:latin typeface="Calibri"/>
               </a:rPr>
-              <a:t>2.9%</a:t>
+              <a:t>3.4%</a:t>
             </a:r>
           </a:p>
         </p:txBody>
@@ -33438,7 +33438,7 @@
                 </a:solidFill>
                 <a:latin typeface="Calibri"/>
               </a:rPr>
-              <a:t>Lager 500ml</a:t>
+              <a:t>Stout 650ml</a:t>
             </a:r>
           </a:p>
         </p:txBody>
@@ -33594,7 +33594,7 @@
                 </a:solidFill>
                 <a:latin typeface="Calibri"/>
               </a:rPr>
-              <a:t>Strong Beer 500ml</a:t>
+              <a:t>Wheat 330ml</a:t>
             </a:r>
           </a:p>
         </p:txBody>
@@ -33750,7 +33750,7 @@
                 </a:solidFill>
                 <a:latin typeface="Calibri"/>
               </a:rPr>
-              <a:t>Wheat 330ml</a:t>
+              <a:t>Premium Lager 330ml</a:t>
             </a:r>
           </a:p>
         </p:txBody>
@@ -33807,7 +33807,7 @@
         <p:spPr>
           <a:xfrm>
             <a:off x="3017520" y="3785615"/>
-            <a:ext cx="368686" cy="219456"/>
+            <a:ext cx="358444" cy="219456"/>
           </a:xfrm>
           <a:prstGeom prst="rect">
             <a:avLst/>
@@ -33849,7 +33849,7 @@
         </p:nvSpPr>
         <p:spPr>
           <a:xfrm>
-            <a:off x="3431926" y="3767327"/>
+            <a:off x="3421684" y="3767327"/>
             <a:ext cx="548640" cy="237744"/>
           </a:xfrm>
           <a:prstGeom prst="rect">
@@ -33871,7 +33871,7 @@
                 </a:solidFill>
                 <a:latin typeface="Calibri"/>
               </a:rPr>
-              <a:t>3.6%</a:t>
+              <a:t>3.5%</a:t>
             </a:r>
           </a:p>
         </p:txBody>
@@ -33906,7 +33906,7 @@
                 </a:solidFill>
                 <a:latin typeface="Calibri"/>
               </a:rPr>
-              <a:t>Stout 650ml</a:t>
+              <a:t>IPA 330ml</a:t>
             </a:r>
           </a:p>
         </p:txBody>
@@ -33963,7 +33963,7 @@
         <p:spPr>
           <a:xfrm>
             <a:off x="3017520" y="4242816"/>
-            <a:ext cx="419892" cy="219456"/>
+            <a:ext cx="399409" cy="219456"/>
           </a:xfrm>
           <a:prstGeom prst="rect">
             <a:avLst/>
@@ -34005,7 +34005,7 @@
         </p:nvSpPr>
         <p:spPr>
           <a:xfrm>
-            <a:off x="3483132" y="4224527"/>
+            <a:off x="3462649" y="4224527"/>
             <a:ext cx="548640" cy="237744"/>
           </a:xfrm>
           <a:prstGeom prst="rect">
@@ -34027,7 +34027,7 @@
                 </a:solidFill>
                 <a:latin typeface="Calibri"/>
               </a:rPr>
-              <a:t>4.1%</a:t>
+              <a:t>3.9%</a:t>
             </a:r>
           </a:p>
         </p:txBody>
@@ -34062,7 +34062,7 @@
                 </a:solidFill>
                 <a:latin typeface="Calibri"/>
               </a:rPr>
-              <a:t>IPA 330ml</a:t>
+              <a:t>Lager 500ml</a:t>
             </a:r>
           </a:p>
         </p:txBody>
@@ -34119,7 +34119,7 @@
         <p:spPr>
           <a:xfrm>
             <a:off x="3017520" y="4700016"/>
-            <a:ext cx="430133" cy="219456"/>
+            <a:ext cx="481340" cy="219456"/>
           </a:xfrm>
           <a:prstGeom prst="rect">
             <a:avLst/>
@@ -34161,7 +34161,7 @@
         </p:nvSpPr>
         <p:spPr>
           <a:xfrm>
-            <a:off x="3493373" y="4681727"/>
+            <a:off x="3544580" y="4681727"/>
             <a:ext cx="548640" cy="237744"/>
           </a:xfrm>
           <a:prstGeom prst="rect">
@@ -34183,7 +34183,7 @@
                 </a:solidFill>
                 <a:latin typeface="Calibri"/>
               </a:rPr>
-              <a:t>4.2%</a:t>
+              <a:t>4.7%</a:t>
             </a:r>
           </a:p>
         </p:txBody>
@@ -34218,7 +34218,7 @@
                 </a:solidFill>
                 <a:latin typeface="Calibri"/>
               </a:rPr>
-              <a:t>Premium Lager 330ml</a:t>
+              <a:t>Strong Beer 500ml</a:t>
             </a:r>
           </a:p>
         </p:txBody>
@@ -35935,7 +35935,7 @@
                 </a:solidFill>
                 <a:latin typeface="Calibri"/>
               </a:rPr>
-              <a:t>25</a:t>
+              <a:t>23</a:t>
             </a:r>
           </a:p>
         </p:txBody>
@@ -36241,7 +36241,7 @@
                 </a:solidFill>
                 <a:latin typeface="Calibri"/>
               </a:rPr>
-              <a:t>7</a:t>
+              <a:t>9</a:t>
             </a:r>
           </a:p>
         </p:txBody>
